--- a/docs/04_営業ツール/提案資料/営業提案書_v2.pptx
+++ b/docs/04_営業ツール/提案資料/営業提案書_v2.pptx
@@ -4732,7 +4732,7 @@
               </a:defRPr>
             </a:pPr>
             <a:r>
-              <a:t>3ヶ月間は完全無料です。資料請求・見学会予約が来ても0円。隠れた費用は一切ありません。</a:t>
+              <a:t>3ヶ月間は完全無料です。会員登録・AI診断・見学会予約が来ても0円。隠れた費用は一切ありません。</a:t>
             </a:r>
           </a:p>
         </p:txBody>
@@ -9052,7 +9052,7 @@
               </a:defRPr>
             </a:pPr>
             <a:r>
-              <a:t>資料請求</a:t>
+              <a:t>AI家づくり診断</a:t>
             </a:r>
           </a:p>
         </p:txBody>
